--- a/downloads/Property_Dualism_Slides.pptx
+++ b/downloads/Property_Dualism_Slides.pptx
@@ -1810,7 +1810,7 @@
         <a:p>
           <a:r>
             <a:rPr lang="en-GB"/>
-            <a:t>It is ‘counter intuitive’</a:t>
+            <a:t>It is ‘counter-intuitive’</a:t>
           </a:r>
           <a:endParaRPr lang="en-US"/>
         </a:p>
@@ -1930,7 +1930,7 @@
         <a:p>
           <a:r>
             <a:rPr lang="en-GB"/>
-            <a:t>A category Error?</a:t>
+            <a:t>A category error?</a:t>
           </a:r>
           <a:endParaRPr lang="en-US"/>
         </a:p>
@@ -2389,7 +2389,7 @@
           </a:pPr>
           <a:r>
             <a:rPr lang="en-GB" sz="2100" kern="1200"/>
-            <a:t>It is ‘counter intuitive’</a:t>
+            <a:t>It is ‘counter-intuitive’</a:t>
           </a:r>
           <a:endParaRPr lang="en-US" sz="2100" kern="1200"/>
         </a:p>
@@ -2815,7 +2815,7 @@
           </a:pPr>
           <a:r>
             <a:rPr lang="en-GB" sz="2100" kern="1200"/>
-            <a:t>A category Error?</a:t>
+            <a:t>A category error?</a:t>
           </a:r>
           <a:endParaRPr lang="en-US" sz="2100" kern="1200"/>
         </a:p>
